--- a/m8/diapositivos/sessao-02-m8-f03.pptx
+++ b/m8/diapositivos/sessao-02-m8-f03.pptx
@@ -3329,7 +3329,41 @@
                 <a:ea typeface="Arial" pitchFamily="34" charset="-122"/>
                 <a:cs typeface="Arial" pitchFamily="34" charset="-120"/>
               </a:rPr>
-              <a:t>Jorge de Sena, «Uma pequenina luz»; texto e vídeo na RTP Ensina, programa Voz (2005, dito por Carmen Dolores). Grafia da página.</a:t>
+              <a:t>Jorge de Sena, «Uma pequenina luz»; texto e vídeo na RTP Ensina, programa </a:t>
+            </a:r>
+            <a:pPr indent="0" marL="0">
+              <a:lnSpc>
+                <a:spcPct val="105000"/>
+              </a:lnSpc>
+              <a:buNone/>
+            </a:pPr>
+            <a:r>
+              <a:rPr lang="en-US" sz="2400" i="1" dirty="0">
+                <a:solidFill>
+                  <a:srgbClr val="F2F0EA"/>
+                </a:solidFill>
+                <a:latin typeface="Arial" pitchFamily="34" charset="0"/>
+                <a:ea typeface="Arial" pitchFamily="34" charset="-122"/>
+                <a:cs typeface="Arial" pitchFamily="34" charset="-120"/>
+              </a:rPr>
+              <a:t>Voz</a:t>
+            </a:r>
+            <a:pPr indent="0" marL="0">
+              <a:lnSpc>
+                <a:spcPct val="105000"/>
+              </a:lnSpc>
+              <a:buNone/>
+            </a:pPr>
+            <a:r>
+              <a:rPr lang="en-US" sz="2400" dirty="0">
+                <a:solidFill>
+                  <a:srgbClr val="F2F0EA"/>
+                </a:solidFill>
+                <a:latin typeface="Arial" pitchFamily="34" charset="0"/>
+                <a:ea typeface="Arial" pitchFamily="34" charset="-122"/>
+                <a:cs typeface="Arial" pitchFamily="34" charset="-120"/>
+              </a:rPr>
+              <a:t> (2005, dito por Carmen Dolores). Grafia da página.</a:t>
             </a:r>
             <a:endParaRPr lang="en-US" sz="2400" dirty="0"/>
           </a:p>
@@ -3457,7 +3491,41 @@
                 <a:ea typeface="Arial" pitchFamily="34" charset="-122"/>
                 <a:cs typeface="Arial" pitchFamily="34" charset="-120"/>
               </a:rPr>
-              <a:t>Jorge de Sena, «Carta a meus filhos sobre os fuzilamentos de Goya», Metamorfoses (1963).</a:t>
+              <a:t>Jorge de Sena, «Carta a meus filhos sobre os fuzilamentos de Goya», </a:t>
+            </a:r>
+            <a:pPr indent="0" marL="0">
+              <a:lnSpc>
+                <a:spcPct val="105000"/>
+              </a:lnSpc>
+              <a:buNone/>
+            </a:pPr>
+            <a:r>
+              <a:rPr lang="en-US" sz="2400" i="1" dirty="0">
+                <a:solidFill>
+                  <a:srgbClr val="F2F0EA"/>
+                </a:solidFill>
+                <a:latin typeface="Arial" pitchFamily="34" charset="0"/>
+                <a:ea typeface="Arial" pitchFamily="34" charset="-122"/>
+                <a:cs typeface="Arial" pitchFamily="34" charset="-120"/>
+              </a:rPr>
+              <a:t>Metamorfoses</a:t>
+            </a:r>
+            <a:pPr indent="0" marL="0">
+              <a:lnSpc>
+                <a:spcPct val="105000"/>
+              </a:lnSpc>
+              <a:buNone/>
+            </a:pPr>
+            <a:r>
+              <a:rPr lang="en-US" sz="2400" dirty="0">
+                <a:solidFill>
+                  <a:srgbClr val="F2F0EA"/>
+                </a:solidFill>
+                <a:latin typeface="Arial" pitchFamily="34" charset="0"/>
+                <a:ea typeface="Arial" pitchFamily="34" charset="-122"/>
+                <a:cs typeface="Arial" pitchFamily="34" charset="-120"/>
+              </a:rPr>
+              <a:t> (1963).</a:t>
             </a:r>
             <a:endParaRPr lang="en-US" sz="2400" dirty="0"/>
           </a:p>
@@ -5608,7 +5676,41 @@
                 <a:ea typeface="Georgia" pitchFamily="34" charset="-122"/>
                 <a:cs typeface="Georgia" pitchFamily="34" charset="-120"/>
               </a:rPr>
-              <a:t>O segundo poema foi escrito a partir do quadro O 3 de Maio de 1808 em Madrid, de Goya (Museu do Prado): o fuzilamento de madrilenos pelas tropas de Napoleão. Ao ler, procura marcas de lugar, de tempo histórico e de juízo moral. As quatro lentes estão na lição «Três vozes, um século».</a:t>
+              <a:t>O segundo poema foi escrito a partir do quadro </a:t>
+            </a:r>
+            <a:pPr indent="0" marL="0">
+              <a:lnSpc>
+                <a:spcPct val="120000"/>
+              </a:lnSpc>
+              <a:buNone/>
+            </a:pPr>
+            <a:r>
+              <a:rPr lang="en-US" sz="2300" i="1" dirty="0">
+                <a:solidFill>
+                  <a:srgbClr val="F2F0EA"/>
+                </a:solidFill>
+                <a:latin typeface="Georgia" pitchFamily="34" charset="0"/>
+                <a:ea typeface="Georgia" pitchFamily="34" charset="-122"/>
+                <a:cs typeface="Georgia" pitchFamily="34" charset="-120"/>
+              </a:rPr>
+              <a:t>O 3 de Maio de 1808 em Madrid</a:t>
+            </a:r>
+            <a:pPr indent="0" marL="0">
+              <a:lnSpc>
+                <a:spcPct val="120000"/>
+              </a:lnSpc>
+              <a:buNone/>
+            </a:pPr>
+            <a:r>
+              <a:rPr lang="en-US" sz="2300" dirty="0">
+                <a:solidFill>
+                  <a:srgbClr val="F2F0EA"/>
+                </a:solidFill>
+                <a:latin typeface="Georgia" pitchFamily="34" charset="0"/>
+                <a:ea typeface="Georgia" pitchFamily="34" charset="-122"/>
+                <a:cs typeface="Georgia" pitchFamily="34" charset="-120"/>
+              </a:rPr>
+              <a:t>, de Goya (Museu do Prado): o fuzilamento de madrilenos pelas tropas de Napoleão. Ao ler, procura marcas de lugar, de tempo histórico e de juízo moral. As quatro lentes estão na lição «Três vozes, um século».</a:t>
             </a:r>
             <a:endParaRPr lang="en-US" sz="2300" dirty="0"/>
           </a:p>
@@ -7249,7 +7351,47 @@
                 <a:ea typeface="Georgia" pitchFamily="34" charset="-122"/>
                 <a:cs typeface="Georgia" pitchFamily="34" charset="-120"/>
               </a:rPr>
-              <a:t>Jorge de Sena prefaciou este livro; os dois estiveram nos Cadernos de Poesia. Lê Sena a partir de um amigo que testemunhou Timor.</a:t>
+              <a:t>Jorge de Sena prefaciou este livro; os dois estiveram nos </a:t>
+            </a:r>
+            <a:pPr indent="0" marL="0">
+              <a:lnSpc>
+                <a:spcPct val="110000"/>
+              </a:lnSpc>
+              <a:spcAft>
+                <a:spcPts val="1400"/>
+              </a:spcAft>
+              <a:buNone/>
+            </a:pPr>
+            <a:r>
+              <a:rPr lang="en-US" sz="2800" i="1" dirty="0">
+                <a:solidFill>
+                  <a:srgbClr val="F2F0EA"/>
+                </a:solidFill>
+                <a:latin typeface="Georgia" pitchFamily="34" charset="0"/>
+                <a:ea typeface="Georgia" pitchFamily="34" charset="-122"/>
+                <a:cs typeface="Georgia" pitchFamily="34" charset="-120"/>
+              </a:rPr>
+              <a:t>Cadernos de Poesia</a:t>
+            </a:r>
+            <a:pPr indent="0" marL="0">
+              <a:lnSpc>
+                <a:spcPct val="110000"/>
+              </a:lnSpc>
+              <a:spcAft>
+                <a:spcPts val="1400"/>
+              </a:spcAft>
+              <a:buNone/>
+            </a:pPr>
+            <a:r>
+              <a:rPr lang="en-US" sz="2800" dirty="0">
+                <a:solidFill>
+                  <a:srgbClr val="F2F0EA"/>
+                </a:solidFill>
+                <a:latin typeface="Georgia" pitchFamily="34" charset="0"/>
+                <a:ea typeface="Georgia" pitchFamily="34" charset="-122"/>
+                <a:cs typeface="Georgia" pitchFamily="34" charset="-120"/>
+              </a:rPr>
+              <a:t>. Lê Sena a partir de um amigo que testemunhou Timor.</a:t>
             </a:r>
             <a:endParaRPr lang="en-US" sz="2800" dirty="0"/>
           </a:p>

--- a/m8/diapositivos/sessao-02-m8-f03.pptx
+++ b/m8/diapositivos/sessao-02-m8-f03.pptx
@@ -7351,7 +7351,7 @@
                 <a:ea typeface="Georgia" pitchFamily="34" charset="-122"/>
                 <a:cs typeface="Georgia" pitchFamily="34" charset="-120"/>
               </a:rPr>
-              <a:t>Jorge de Sena prefaciou este livro; os dois estiveram nos </a:t>
+              <a:t>Ruy Cinatti funda em 1940 os </a:t>
             </a:r>
             <a:pPr indent="0" marL="0">
               <a:lnSpc>
@@ -7391,7 +7391,7 @@
                 <a:ea typeface="Georgia" pitchFamily="34" charset="-122"/>
                 <a:cs typeface="Georgia" pitchFamily="34" charset="-120"/>
               </a:rPr>
-              <a:t>. Lê Sena a partir de um amigo que testemunhou Timor.</a:t>
+              <a:t>, com Tomaz Kim e José Blanc de Portugal; na 2.ª série, a partir de 1951, Jorge de Sena junta-se aos organizadores.</a:t>
             </a:r>
             <a:endParaRPr lang="en-US" sz="2800" dirty="0"/>
           </a:p>

--- a/m8/diapositivos/sessao-02-m8-f03.pptx
+++ b/m8/diapositivos/sessao-02-m8-f03.pptx
@@ -7279,7 +7279,7 @@
                 <a:ea typeface="Arial" pitchFamily="34" charset="-122"/>
                 <a:cs typeface="Arial" pitchFamily="34" charset="-120"/>
               </a:rPr>
-              <a:t>Ruy Cinatti, Timor-Leste</a:t>
+              <a:t>Maria Bethânia, Brasil</a:t>
             </a:r>
             <a:endParaRPr lang="en-US" sz="3400" dirty="0"/>
           </a:p>
@@ -7351,7 +7351,7 @@
                 <a:ea typeface="Georgia" pitchFamily="34" charset="-122"/>
                 <a:cs typeface="Georgia" pitchFamily="34" charset="-120"/>
               </a:rPr>
-              <a:t>Ruy Cinatti funda em 1940 os </a:t>
+              <a:t>Em </a:t>
             </a:r>
             <a:pPr indent="0" marL="0">
               <a:lnSpc>
@@ -7371,7 +7371,7 @@
                 <a:ea typeface="Georgia" pitchFamily="34" charset="-122"/>
                 <a:cs typeface="Georgia" pitchFamily="34" charset="-120"/>
               </a:rPr>
-              <a:t>Cadernos de Poesia</a:t>
+              <a:t>Noturno</a:t>
             </a:r>
             <a:pPr indent="0" marL="0">
               <a:lnSpc>
@@ -7391,7 +7391,7 @@
                 <a:ea typeface="Georgia" pitchFamily="34" charset="-122"/>
                 <a:cs typeface="Georgia" pitchFamily="34" charset="-120"/>
               </a:rPr>
-              <a:t>, com Tomaz Kim e José Blanc de Portugal; na 2.ª série, a partir de 1951, Jorge de Sena junta-se aos organizadores.</a:t>
+              <a:t> (2021), Maria Bethânia fecha o disco a dizer fragmentos de «Uma pequenina luz», de Jorge de Sena, o poema que lês nesta lição.</a:t>
             </a:r>
             <a:endParaRPr lang="en-US" sz="2800" dirty="0"/>
           </a:p>
